--- a/materials/pdf/original/DS16_Folien_Ausblick-Turingmaschine.pptx
+++ b/materials/pdf/original/DS16_Folien_Ausblick-Turingmaschine.pptx
@@ -126,18 +126,18 @@
   <p:extLst>
     <p:ext uri="{521415D9-36F7-43E2-AB2F-B90AF26B5E84}">
       <p14:sectionLst xmlns:p14="http://schemas.microsoft.com/office/powerpoint/2010/main">
-        <p14:section name="Start" id="{b7803322-908f-dd01-ce1d-3cd61460e24e}">
+        <p14:section name="Start" id="{9421d20f-de28-503f-0c5a-e9b7dba33f5a}">
           <p14:sldIdLst>
             <p14:sldId id="256"/>
           </p14:sldIdLst>
         </p14:section>
-        <p14:section name="Einstieg" id="{d6a8ea03-6a51-672b-57b9-2bb0e4adbf4c}">
+        <p14:section name="Einstieg" id="{af520c83-e922-cf5a-a4a5-e932a31a52c2}">
           <p14:sldIdLst>
             <p14:sldId id="257"/>
             <p14:sldId id="258"/>
           </p14:sldIdLst>
         </p14:section>
-        <p14:section name="Erarbeitung" id="{44b10b48-a87e-dde7-0eb1-6ad2b7492c64}">
+        <p14:section name="Erarbeitung" id="{0a5d92c1-063e-538d-150e-32f160c92458}">
           <p14:sldIdLst>
             <p14:sldId id="259"/>
             <p14:sldId id="260"/>
@@ -153,19 +153,19 @@
             <p14:sldId id="271"/>
           </p14:sldIdLst>
         </p14:section>
-        <p14:section name="Übung" id="{17f0b81e-4b94-7b48-fe32-bbb4180024a6}">
+        <p14:section name="Übung" id="{e003fb7e-9dff-90dc-aa05-679b419cb3f7}">
           <p14:sldIdLst>
             <p14:sldId id="267"/>
             <p14:sldId id="272"/>
           </p14:sldIdLst>
         </p14:section>
-        <p14:section name="Erarbeitung" id="{db2607b4-f958-9101-c15a-33185c80f87b}">
+        <p14:section name="Erarbeitung" id="{18798165-f3cd-58ac-6313-93aaa47f9272}">
           <p14:sldIdLst/>
         </p14:section>
-        <p14:section name="Übung" id="{63c29c0f-1ed0-7497-ee20-ddb57589f987}">
+        <p14:section name="Übung" id="{735a7f74-c1d1-49f3-002c-49a1a6469014}">
           <p14:sldIdLst/>
         </p14:section>
-        <p14:section name="Abschluss" id="{a418ce82-8831-1328-e983-844e77352687}">
+        <p14:section name="Abschluss" id="{abca589c-60ee-d37d-9aff-785d7018addb}">
           <p14:sldIdLst>
             <p14:sldId id="273"/>
             <p14:sldId id="274"/>
@@ -752,7 +752,7 @@
           <a:p>
             <a:r>
               <a:rPr lang="en-US" dirty="0"/>
-              <a:t>Kopfposition in eckigen Klammern. Schritt 4: Blank gelesen → Richtungswechsel nach links (S1). Schritte 6–7: Übertrag. Schritt 8: 0 wird zur 1, Halt in S2.</a:t>
+              <a:t>[NUR LEHRKRAFT] Kopfposition in eckigen Klammern. Schritt 4: Blank gelesen → Richtungswechsel nach links (S1). Schritte 6–7: Übertrag. Schritt 8: 0 wird zur 1, Halt in S2.</a:t>
             </a:r>
             <a:endParaRPr lang="en-US" dirty="0"/>
           </a:p>

--- a/materials/pdf/original/DS16_Folien_Ausblick-Turingmaschine.pptx
+++ b/materials/pdf/original/DS16_Folien_Ausblick-Turingmaschine.pptx
@@ -126,18 +126,18 @@
   <p:extLst>
     <p:ext uri="{521415D9-36F7-43E2-AB2F-B90AF26B5E84}">
       <p14:sectionLst xmlns:p14="http://schemas.microsoft.com/office/powerpoint/2010/main">
-        <p14:section name="Start" id="{9421d20f-de28-503f-0c5a-e9b7dba33f5a}">
+        <p14:section name="Start" id="{28e39dc3-c481-8a12-955d-3f3b14d51994}">
           <p14:sldIdLst>
             <p14:sldId id="256"/>
           </p14:sldIdLst>
         </p14:section>
-        <p14:section name="Einstieg" id="{af520c83-e922-cf5a-a4a5-e932a31a52c2}">
+        <p14:section name="Einstieg" id="{1616a03c-dd6e-bbc0-aa05-a40587bdccec}">
           <p14:sldIdLst>
             <p14:sldId id="257"/>
             <p14:sldId id="258"/>
           </p14:sldIdLst>
         </p14:section>
-        <p14:section name="Erarbeitung" id="{0a5d92c1-063e-538d-150e-32f160c92458}">
+        <p14:section name="Erarbeitung" id="{22dae7a1-46ef-c8b5-167f-78b49175f794}">
           <p14:sldIdLst>
             <p14:sldId id="259"/>
             <p14:sldId id="260"/>
@@ -153,19 +153,19 @@
             <p14:sldId id="271"/>
           </p14:sldIdLst>
         </p14:section>
-        <p14:section name="Übung" id="{e003fb7e-9dff-90dc-aa05-679b419cb3f7}">
+        <p14:section name="Übung" id="{9a760e2b-6d25-069d-a782-e9d317cdc0dd}">
           <p14:sldIdLst>
             <p14:sldId id="267"/>
             <p14:sldId id="272"/>
           </p14:sldIdLst>
         </p14:section>
-        <p14:section name="Erarbeitung" id="{18798165-f3cd-58ac-6313-93aaa47f9272}">
+        <p14:section name="Erarbeitung" id="{b4b996f9-daeb-ab62-9e09-3fce90ac022c}">
           <p14:sldIdLst/>
         </p14:section>
-        <p14:section name="Übung" id="{735a7f74-c1d1-49f3-002c-49a1a6469014}">
+        <p14:section name="Übung" id="{6d7dda24-f24d-4a65-7c38-3d518c41fe0f}">
           <p14:sldIdLst/>
         </p14:section>
-        <p14:section name="Abschluss" id="{abca589c-60ee-d37d-9aff-785d7018addb}">
+        <p14:section name="Abschluss" id="{d2aa5887-65fc-ffdf-5d97-130f02383adc}">
           <p14:sldIdLst>
             <p14:sldId id="273"/>
             <p14:sldId id="274"/>
@@ -2575,6 +2575,45 @@
       </p:sp>
       <p:sp>
         <p:nvSpPr>
+          <p:cNvPr id="4" name="Text 1"/>
+          <p:cNvSpPr/>
+          <p:nvPr/>
+        </p:nvSpPr>
+        <p:spPr>
+          <a:xfrm>
+            <a:off x="7985455" y="6473952"/>
+            <a:ext cx="2926080" cy="274320"/>
+          </a:xfrm>
+          <a:prstGeom prst="rect">
+            <a:avLst/>
+          </a:prstGeom>
+          <a:noFill/>
+          <a:ln/>
+        </p:spPr>
+        <p:txBody>
+          <a:bodyPr wrap="square" lIns="0" tIns="0" rIns="0" bIns="0" rtlCol="0" anchor="ctr"/>
+          <a:lstStyle/>
+          <a:p>
+            <a:pPr algn="r" indent="0" marL="0">
+              <a:buNone/>
+            </a:pPr>
+            <a:r>
+              <a:rPr lang="en-US" sz="1100" dirty="0">
+                <a:solidFill>
+                  <a:srgbClr val="5B6770"/>
+                </a:solidFill>
+                <a:latin typeface="Calibri" pitchFamily="34" charset="0"/>
+                <a:ea typeface="Calibri" pitchFamily="34" charset="-122"/>
+                <a:cs typeface="Calibri" pitchFamily="34" charset="-120"/>
+              </a:rPr>
+              <a:t>CC BY-SA 4.0 · Frank Juchim</a:t>
+            </a:r>
+            <a:endParaRPr lang="en-US" sz="1100" dirty="0"/>
+          </a:p>
+        </p:txBody>
+      </p:sp>
+      <p:sp>
+        <p:nvSpPr>
           <p:cNvPr id="25" name="Slide Number Placeholder 0"/>
           <p:cNvSpPr>
             <a:spLocks noGrp="1"/>
@@ -2726,6 +2765,45 @@
                 <a:cs typeface="Calibri" pitchFamily="34" charset="-120"/>
               </a:rPr>
               <a:t>Level 16 · Welt D · Sprachdesign &amp; Ausblick · Zusatz (über das KC hinaus)</a:t>
+            </a:r>
+            <a:endParaRPr lang="en-US" sz="1100" dirty="0"/>
+          </a:p>
+        </p:txBody>
+      </p:sp>
+      <p:sp>
+        <p:nvSpPr>
+          <p:cNvPr id="4" name="Text 1"/>
+          <p:cNvSpPr/>
+          <p:nvPr/>
+        </p:nvSpPr>
+        <p:spPr>
+          <a:xfrm>
+            <a:off x="7985455" y="6473952"/>
+            <a:ext cx="2926080" cy="274320"/>
+          </a:xfrm>
+          <a:prstGeom prst="rect">
+            <a:avLst/>
+          </a:prstGeom>
+          <a:noFill/>
+          <a:ln/>
+        </p:spPr>
+        <p:txBody>
+          <a:bodyPr wrap="square" lIns="0" tIns="0" rIns="0" bIns="0" rtlCol="0" anchor="ctr"/>
+          <a:lstStyle/>
+          <a:p>
+            <a:pPr algn="r" indent="0" marL="0">
+              <a:buNone/>
+            </a:pPr>
+            <a:r>
+              <a:rPr lang="en-US" sz="1100" dirty="0">
+                <a:solidFill>
+                  <a:srgbClr val="5B6770"/>
+                </a:solidFill>
+                <a:latin typeface="Calibri" pitchFamily="34" charset="0"/>
+                <a:ea typeface="Calibri" pitchFamily="34" charset="-122"/>
+                <a:cs typeface="Calibri" pitchFamily="34" charset="-120"/>
+              </a:rPr>
+              <a:t>CC BY-SA 4.0 · Frank Juchim</a:t>
             </a:r>
             <a:endParaRPr lang="en-US" sz="1100" dirty="0"/>
           </a:p>
